--- a/day3_deep_learning/slides.pptx
+++ b/day3_deep_learning/slides.pptx
@@ -933,7 +933,7 @@
           <a:p/>
           <a:p>
             <a:r>
-              <a:t>8 min. Gómez-Bombarelli et al. 2018 was the landmark paper: encode molecules to latent space, decode back. Modify the latent representation to change properties.</a:t>
+              <a:t>8 min. CITATION: Gómez-Bombarelli et al. (2018) 'Automatic Chemical Design Using a Data-Driven Continuous Representation of Molecules.' ACS Central Science 4:268-276. This was the landmark paper: encode molecules to latent space, decode back. Modify the latent representation to change properties.</a:t>
             </a:r>
           </a:p>
           <a:p/>
@@ -1179,13 +1179,13 @@
           <a:p/>
           <a:p>
             <a:r>
-              <a:t>7 min. AlphaFold2 accuracy matches experimental methods. Nobel Prize 2024 for Hassabis and Jumper.</a:t>
+              <a:t>7 min. CITATION: Jumper et al. (2021) 'Highly accurate protein structure prediction with AlphaFold.' Nature 596:583-589. doi:10.1038/s41586-021-03819-2. AlphaFold2 accuracy matches experimental methods (GDT &gt;90 on CASP14). 2024 Nobel Prize in Chemistry awarded to Demis Hassabis and John Jumper (shared with David Baker for computational protein design).</a:t>
             </a:r>
           </a:p>
           <a:p/>
           <a:p>
             <a:r>
-              <a:t>AlphaFold3 is the game-changer for drug design: predicts protein-ligand complexes directly.</a:t>
+              <a:t>CITATION: Abramson et al. (2024) 'Accurate structure prediction of biomolecular interactions with AlphaFold 3.' Nature 630:493-500. doi:10.1038/s41586-024-07487-w. AlphaFold3 is the game-changer for drug design: predicts protein-ligand complexes directly. Uses a diffusion-based architecture (different from AF2's end-to-end Evoformer approach).</a:t>
             </a:r>
           </a:p>
           <a:p/>
@@ -1196,23 +1196,23 @@
           </a:p>
           <a:p>
             <a:r>
-              <a:t>- Ion channels (hERG, Nav, GluCl, GABA-A): membrane proteins that were hard to crystallize</a:t>
-            </a:r>
-          </a:p>
-          <a:p>
-            <a:r>
-              <a:t>- GPCRs (serotonin, dopamine, opioid receptors): ~34% of all FDA-approved drugs target GPCRs</a:t>
-            </a:r>
-          </a:p>
-          <a:p>
-            <a:r>
-              <a:t>- Transporters (SERT, DAT): targets for SSRIs, methylphenidate</a:t>
+              <a:t>- Ion channels (hERG, Nav, GluCl, GABA-A): membrane proteins that were extremely hard to crystallize. AlphaFold structures opened up structure-based drug design for these targets.</a:t>
+            </a:r>
+          </a:p>
+          <a:p>
+            <a:r>
+              <a:t>- GPCRs (serotonin 5-HT2A, dopamine D2, opioid receptors): ~34% of all FDA-approved drugs target GPCRs (Saikia et al. 2019, Curr. Drug Targets 20:522-539). AlphaFold structures complement cryo-EM structures.</a:t>
+            </a:r>
+          </a:p>
+          <a:p>
+            <a:r>
+              <a:t>- Transporters (SERT, DAT): targets for SSRIs (fluoxetine/Prozac), methylphenidate (Ritalin)</a:t>
             </a:r>
           </a:p>
           <a:p/>
           <a:p>
             <a:r>
-              <a:t>Student project: pick one of these targets, retrieve AlphaFold structure, analyze binding site.</a:t>
+              <a:t>Student project: pick one of these targets, retrieve AlphaFold structure from uniprot.org → AlphaFold DB, analyze binding site, compare to experimental PDB structure.</a:t>
             </a:r>
           </a:p>
         </p:txBody>
@@ -1294,7 +1294,7 @@
           <a:p/>
           <a:p>
             <a:r>
-              <a:t>DiffDock (Corso et al. 2022) uses diffusion models for docking — deep learning applied to pose prediction. State-of-the-art.</a:t>
+              <a:t>CITATION: DiffDock: Corso et al. (2023) 'DiffDock: Diffusion Steps, Twists, and Turns for Molecular Docking.' ICLR 2023. (arXiv preprint: 2022, arXiv:2210.01776.) Uses diffusion models for molecular docking — generates multiple plausible binding poses and scores them. State-of-the-art for blind docking (no prior knowledge of binding site).</a:t>
             </a:r>
           </a:p>
         </p:txBody>
@@ -1680,7 +1680,7 @@
           <a:p/>
           <a:p>
             <a:r>
-              <a:t>7-min discussion. RF wins on small data, when interpretability is critical, or when compute is limited. GNN wins on large data. Yang et al. 2019: Chemprop beat RF on 7/8 MoleculeNet tasks, but RF won on 1.</a:t>
+              <a:t>7-min discussion. RF wins on small data, when interpretability is critical, or when compute is limited. GNN wins on large data. CITATION: Yang et al. (2019) 'Analyzing Learned Molecular Representations for Property Prediction.' JCIM 59:3370-3388. Chemprop (D-MPNN) beat RF on 7/8 MoleculeNet tasks, but RF won on 1.</a:t>
             </a:r>
           </a:p>
           <a:p/>
@@ -2154,7 +2154,27 @@
           <a:p/>
           <a:p>
             <a:r>
-              <a:t>5 min overview. GCN is simple and effective. MPNN unifies the field. Chemprop (Yang et al. 2019) is the best out-of-the-box molecular GNN — use it for projects!</a:t>
+              <a:t>5 min overview.</a:t>
+            </a:r>
+          </a:p>
+          <a:p>
+            <a:r>
+              <a:t>CITATION: GCN: Kipf &amp; Welling (2017) 'Semi-Supervised Classification with Graph Convolutional Networks.' ICLR 2017. ~56,000 citations as of 2026 — one of the most influential ML papers.</a:t>
+            </a:r>
+          </a:p>
+          <a:p>
+            <a:r>
+              <a:t>CITATION: GAT: Veličković et al. (2018) 'Graph Attention Networks.' ICLR 2018. Learns attention weights so not all neighbors contribute equally.</a:t>
+            </a:r>
+          </a:p>
+          <a:p>
+            <a:r>
+              <a:t>CITATION: MPNN: Gilmer et al. (2017) 'Neural Message Passing for Quantum Chemistry.' ICML 2017, pp. 1263-1272. The unifying framework — shows GCN, GAT, and others are all special cases of message passing.</a:t>
+            </a:r>
+          </a:p>
+          <a:p>
+            <a:r>
+              <a:t>CITATION: Chemprop/D-MPNN: Yang et al. (2019) JCIM 59:3370-3388. Best out-of-the-box molecular GNN — use it for projects!</a:t>
             </a:r>
           </a:p>
         </p:txBody>
@@ -2306,7 +2326,7 @@
           <a:p/>
           <a:p>
             <a:r>
-              <a:t>7 min. Stokes et al. 2020 Cell: neural network on 2,335 molecules → screened Broad repurposing library → discovered halicin.</a:t>
+              <a:t>7 min. CITATION: Stokes et al. (2020) 'A Deep Learning Approach to Antibiotic Discovery.' Cell 180:688-702. Neural network on 2,335 molecules → screened Broad repurposing library → discovered halicin.</a:t>
             </a:r>
           </a:p>
           <a:p/>
@@ -2317,7 +2337,7 @@
           </a:p>
           <a:p>
             <a:r>
-              <a:t>The Drosophila brain (Dorkenwald et al. 2024, Nature): ~140K neurons, ~50M synapses = the ultimate graph dataset.</a:t>
+              <a:t>CITATION: Dorkenwald et al. (2024) 'Neuronal wiring diagram of an adult brain.' Nature 634:124-138. The Drosophila brain (FlyWire): ~139K neurons, ~54.5M synapses = the ultimate graph dataset.</a:t>
             </a:r>
           </a:p>
           <a:p/>
@@ -6743,7 +6763,7 @@
               </a:defRPr>
             </a:pPr>
             <a:r>
-              <a:t>  5. Diffusion Models — state-of-the-art (Hoogeboom et al. 2022)</a:t>
+              <a:t>  5. Diffusion Models — state-of-the-art (Hoogeboom et al., ICML 2022)</a:t>
             </a:r>
           </a:p>
           <a:p>
@@ -7810,7 +7830,7 @@
               </a:defRPr>
             </a:pPr>
             <a:r>
-              <a:t>  AutoDock Vina, GNINA, DiffDock (Corso et al. 2022)</a:t>
+              <a:t>  AutoDock Vina, GNINA, DiffDock (Corso et al. 2023, ICLR)</a:t>
             </a:r>
           </a:p>
           <a:p>
@@ -11170,36 +11190,36 @@
               </a:defRPr>
             </a:pPr>
             <a:r>
-              <a:t>  Simple, effective, ~12,000 citations</a:t>
-            </a:r>
-          </a:p>
-          <a:p>
-            <a:pPr>
-              <a:spcAft>
-                <a:spcPts val="800"/>
-              </a:spcAft>
-              <a:defRPr sz="2000">
-                <a:solidFill>
-                  <a:srgbClr val="323232"/>
-                </a:solidFill>
-                <a:latin typeface="Calibri"/>
-              </a:defRPr>
-            </a:pPr>
-          </a:p>
-          <a:p>
-            <a:pPr>
-              <a:spcAft>
-                <a:spcPts val="800"/>
-              </a:spcAft>
-              <a:defRPr sz="2000">
-                <a:solidFill>
-                  <a:srgbClr val="323232"/>
-                </a:solidFill>
-                <a:latin typeface="Calibri"/>
-              </a:defRPr>
-            </a:pPr>
-            <a:r>
-              <a:t>GAT — Graph Attention Network (Velickovic et al. 2018, ICLR)</a:t>
+              <a:t>  Simple, effective, widely adopted (~56,000+ citations as of 2026)</a:t>
+            </a:r>
+          </a:p>
+          <a:p>
+            <a:pPr>
+              <a:spcAft>
+                <a:spcPts val="800"/>
+              </a:spcAft>
+              <a:defRPr sz="2000">
+                <a:solidFill>
+                  <a:srgbClr val="323232"/>
+                </a:solidFill>
+                <a:latin typeface="Calibri"/>
+              </a:defRPr>
+            </a:pPr>
+          </a:p>
+          <a:p>
+            <a:pPr>
+              <a:spcAft>
+                <a:spcPts val="800"/>
+              </a:spcAft>
+              <a:defRPr sz="2000">
+                <a:solidFill>
+                  <a:srgbClr val="323232"/>
+                </a:solidFill>
+                <a:latin typeface="Calibri"/>
+              </a:defRPr>
+            </a:pPr>
+            <a:r>
+              <a:t>GAT — Graph Attention Network (Veličković et al. 2018, ICLR)</a:t>
             </a:r>
           </a:p>
           <a:p>
@@ -11746,7 +11766,7 @@
               </a:defRPr>
             </a:pPr>
             <a:r>
-              <a:t>  Drosophila connectome (FlyWire: 140K neurons, 50M synapses) → graph!</a:t>
+              <a:t>  Drosophila connectome (FlyWire: ~139K neurons, ~54.5M synapses) → graph!</a:t>
             </a:r>
           </a:p>
           <a:p>

--- a/day3_deep_learning/slides.pptx
+++ b/day3_deep_learning/slides.pptx
@@ -7610,7 +7610,7 @@
               </a:defRPr>
             </a:pPr>
             <a:r>
-              <a:t>  GluCl (ivermectin target, Dr. Serbe-Kamp's Cys-loop family)</a:t>
+              <a:t>  GluCl (ivermectin target, Cys-loop receptor superfamily)</a:t>
             </a:r>
           </a:p>
           <a:p>
@@ -11827,39 +11827,39 @@
               </a:defRPr>
             </a:pPr>
             <a:r>
-              <a:t>Dr. Serbe-Kamp's field:</a:t>
-            </a:r>
-          </a:p>
-          <a:p>
-            <a:pPr>
-              <a:spcAft>
-                <a:spcPts val="800"/>
-              </a:spcAft>
-              <a:defRPr sz="2000">
-                <a:solidFill>
-                  <a:srgbClr val="323232"/>
-                </a:solidFill>
-                <a:latin typeface="Calibri"/>
-              </a:defRPr>
-            </a:pPr>
-            <a:r>
-              <a:t>  Visual motion circuit mapped by physiology (2016 Neuron paper)</a:t>
-            </a:r>
-          </a:p>
-          <a:p>
-            <a:pPr>
-              <a:spcAft>
-                <a:spcPts val="800"/>
-              </a:spcAft>
-              <a:defRPr sz="2000">
-                <a:solidFill>
-                  <a:srgbClr val="323232"/>
-                </a:solidFill>
-                <a:latin typeface="Calibri"/>
-              </a:defRPr>
-            </a:pPr>
-            <a:r>
-              <a:t>  Currently working on connectomics graph data with MESH repository</a:t>
+              <a:t>Neuroscience &amp; Connectomics:</a:t>
+            </a:r>
+          </a:p>
+          <a:p>
+            <a:pPr>
+              <a:spcAft>
+                <a:spcPts val="800"/>
+              </a:spcAft>
+              <a:defRPr sz="2000">
+                <a:solidFill>
+                  <a:srgbClr val="323232"/>
+                </a:solidFill>
+                <a:latin typeface="Calibri"/>
+              </a:defRPr>
+            </a:pPr>
+            <a:r>
+              <a:t>  Visual motion circuit: physiology + connectomics approach</a:t>
+            </a:r>
+          </a:p>
+          <a:p>
+            <a:pPr>
+              <a:spcAft>
+                <a:spcPts val="800"/>
+              </a:spcAft>
+              <a:defRPr sz="2000">
+                <a:solidFill>
+                  <a:srgbClr val="323232"/>
+                </a:solidFill>
+                <a:latin typeface="Calibri"/>
+              </a:defRPr>
+            </a:pPr>
+            <a:r>
+              <a:t>  Connectomics graph data (MESH repository) = neurons as graph nodes</a:t>
             </a:r>
           </a:p>
           <a:p>
@@ -12137,39 +12137,39 @@
               </a:defRPr>
             </a:pPr>
             <a:r>
-              <a:t>From Dr. Serbe-Kamp's research:</a:t>
-            </a:r>
-          </a:p>
-          <a:p>
-            <a:pPr>
-              <a:spcAft>
-                <a:spcPts val="800"/>
-              </a:spcAft>
-              <a:defRPr sz="2000">
-                <a:solidFill>
-                  <a:srgbClr val="323232"/>
-                </a:solidFill>
-                <a:latin typeface="Calibri"/>
-              </a:defRPr>
-            </a:pPr>
-            <a:r>
-              <a:t>  Physiology (2016 Neuron): functional characterization of T5 circuit</a:t>
-            </a:r>
-          </a:p>
-          <a:p>
-            <a:pPr>
-              <a:spcAft>
-                <a:spcPts val="800"/>
-              </a:spcAft>
-              <a:defRPr sz="2000">
-                <a:solidFill>
-                  <a:srgbClr val="323232"/>
-                </a:solidFill>
-                <a:latin typeface="Calibri"/>
-              </a:defRPr>
-            </a:pPr>
-            <a:r>
-              <a:t>  Connectomics (MESH, current): structural graph of neural wiring</a:t>
+              <a:t>Neuroscience example:</a:t>
+            </a:r>
+          </a:p>
+          <a:p>
+            <a:pPr>
+              <a:spcAft>
+                <a:spcPts val="800"/>
+              </a:spcAft>
+              <a:defRPr sz="2000">
+                <a:solidFill>
+                  <a:srgbClr val="323232"/>
+                </a:solidFill>
+                <a:latin typeface="Calibri"/>
+              </a:defRPr>
+            </a:pPr>
+            <a:r>
+              <a:t>  Physiology: functional characterization of T5 circuit (Serbe et al. 2016, Neuron)</a:t>
+            </a:r>
+          </a:p>
+          <a:p>
+            <a:pPr>
+              <a:spcAft>
+                <a:spcPts val="800"/>
+              </a:spcAft>
+              <a:defRPr sz="2000">
+                <a:solidFill>
+                  <a:srgbClr val="323232"/>
+                </a:solidFill>
+                <a:latin typeface="Calibri"/>
+              </a:defRPr>
+            </a:pPr>
+            <a:r>
+              <a:t>  Connectomics: structural graph of neural wiring (MESH repository)</a:t>
             </a:r>
           </a:p>
           <a:p>
